--- a/apps/resources/bundled_files/5-klass-amaldardyn-tartibi-sabak-v6.pptx
+++ b/apps/resources/bundled_files/5-klass-amaldardyn-tartibi-sabak-v6.pptx
@@ -6206,7 +6206,7 @@
                 </a:solidFill>
                 <a:latin typeface="PT Sans"/>
               </a:rPr>
-              <a:t>5-класс › Амалдардын тартиби</a:t>
+              <a:t>Амалдардын тартиби</a:t>
             </a:r>
           </a:p>
           <a:p>
@@ -7094,7 +7094,7 @@
                 </a:solidFill>
                 <a:latin typeface="PT Sans"/>
               </a:rPr>
-              <a:t>5-класс › Амалдардын тартиби</a:t>
+              <a:t>Амалдардын тартиби</a:t>
             </a:r>
           </a:p>
           <a:p>
@@ -8659,7 +8659,7 @@
                 </a:solidFill>
                 <a:latin typeface="PT Sans"/>
               </a:rPr>
-              <a:t>5-класс › Амалдардын тартиби</a:t>
+              <a:t>Амалдардын тартиби</a:t>
             </a:r>
           </a:p>
           <a:p>
@@ -10125,7 +10125,7 @@
                 </a:solidFill>
                 <a:latin typeface="PT Sans"/>
               </a:rPr>
-              <a:t>5-класс › Амалдардын тартиби</a:t>
+              <a:t>Амалдардын тартиби</a:t>
             </a:r>
           </a:p>
           <a:p>
@@ -13289,7 +13289,7 @@
                 </a:solidFill>
                 <a:latin typeface="PT Sans"/>
               </a:rPr>
-              <a:t>5-класс › Амалдардын тартиби</a:t>
+              <a:t>Амалдардын тартиби</a:t>
             </a:r>
           </a:p>
           <a:p>
@@ -15897,7 +15897,7 @@
                 </a:solidFill>
                 <a:latin typeface="PT Sans"/>
               </a:rPr>
-              <a:t>5-класс › Амалдардын тартиби</a:t>
+              <a:t>Амалдардын тартиби</a:t>
             </a:r>
           </a:p>
           <a:p>
@@ -17380,7 +17380,7 @@
                 </a:solidFill>
                 <a:latin typeface="PT Sans"/>
               </a:rPr>
-              <a:t>5-класс › Амалдардын тартиби</a:t>
+              <a:t>Амалдардын тартиби</a:t>
             </a:r>
           </a:p>
           <a:p>
@@ -20883,7 +20883,7 @@
                 </a:solidFill>
                 <a:latin typeface="PT Sans"/>
               </a:rPr>
-              <a:t>5-класс › Амалдардын тартиби</a:t>
+              <a:t>Амалдардын тартиби</a:t>
             </a:r>
           </a:p>
           <a:p>
@@ -22466,7 +22466,7 @@
                 </a:solidFill>
                 <a:latin typeface="PT Sans"/>
               </a:rPr>
-              <a:t>5-класс › Амалдардын тартиби</a:t>
+              <a:t>Амалдардын тартиби</a:t>
             </a:r>
           </a:p>
           <a:p>
@@ -24171,7 +24171,7 @@
                 </a:solidFill>
                 <a:latin typeface="PT Sans"/>
               </a:rPr>
-              <a:t>5-класс › Амалдардын тартиби</a:t>
+              <a:t>Амалдардын тартиби</a:t>
             </a:r>
           </a:p>
           <a:p>
@@ -25482,7 +25482,7 @@
                 </a:solidFill>
                 <a:latin typeface="PT Sans"/>
               </a:rPr>
-              <a:t>5-класс › Амалдардын тартиби</a:t>
+              <a:t>Амалдардын тартиби</a:t>
             </a:r>
           </a:p>
           <a:p>
@@ -27755,7 +27755,7 @@
                 </a:solidFill>
                 <a:latin typeface="PT Sans"/>
               </a:rPr>
-              <a:t>5-класс › Амалдардын тартиби</a:t>
+              <a:t>Амалдардын тартиби</a:t>
             </a:r>
           </a:p>
           <a:p>
@@ -28945,7 +28945,7 @@
                 </a:solidFill>
                 <a:latin typeface="PT Sans"/>
               </a:rPr>
-              <a:t>5-класс › Амалдардын тартиби</a:t>
+              <a:t>Амалдардын тартиби</a:t>
             </a:r>
           </a:p>
           <a:p>
@@ -31716,7 +31716,7 @@
                 </a:solidFill>
                 <a:latin typeface="PT Sans"/>
               </a:rPr>
-              <a:t>5-класс › Амалдардын тартиби</a:t>
+              <a:t>Амалдардын тартиби</a:t>
             </a:r>
           </a:p>
           <a:p>
@@ -34327,7 +34327,7 @@
                 </a:solidFill>
                 <a:latin typeface="PT Sans"/>
               </a:rPr>
-              <a:t>5-класс › Амалдардын тартиби</a:t>
+              <a:t>Амалдардын тартиби</a:t>
             </a:r>
           </a:p>
           <a:p>
@@ -38742,7 +38742,7 @@
                 </a:solidFill>
                 <a:latin typeface="PT Sans"/>
               </a:rPr>
-              <a:t>5-класс › Амалдардын тартиби</a:t>
+              <a:t>Амалдардын тартиби</a:t>
             </a:r>
           </a:p>
           <a:p>
@@ -39796,7 +39796,7 @@
                 </a:solidFill>
                 <a:latin typeface="PT Sans"/>
               </a:rPr>
-              <a:t>5-класс › Амалдардын тартиби</a:t>
+              <a:t>Амалдардын тартиби</a:t>
             </a:r>
           </a:p>
           <a:p>
@@ -41279,7 +41279,7 @@
                 </a:solidFill>
                 <a:latin typeface="PT Sans"/>
               </a:rPr>
-              <a:t>5-класс › Амалдардын тартиби</a:t>
+              <a:t>Амалдардын тартиби</a:t>
             </a:r>
           </a:p>
           <a:p>
@@ -43014,7 +43014,7 @@
                 </a:solidFill>
                 <a:latin typeface="PT Sans"/>
               </a:rPr>
-              <a:t>5-класс › Амалдардын тартиби</a:t>
+              <a:t>Амалдардын тартиби</a:t>
             </a:r>
           </a:p>
           <a:p>
@@ -44217,7 +44217,7 @@
                 </a:solidFill>
                 <a:latin typeface="PT Sans"/>
               </a:rPr>
-              <a:t>5-класс › Амалдардын тартиби</a:t>
+              <a:t>Амалдардын тартиби</a:t>
             </a:r>
           </a:p>
           <a:p>
@@ -46614,7 +46614,7 @@
                 </a:solidFill>
                 <a:latin typeface="PT Sans"/>
               </a:rPr>
-              <a:t>5-класс › Амалдардын тартиби</a:t>
+              <a:t>Амалдардын тартиби</a:t>
             </a:r>
           </a:p>
           <a:p>
@@ -48266,7 +48266,7 @@
                 </a:solidFill>
                 <a:latin typeface="PT Sans"/>
               </a:rPr>
-              <a:t>5-класс › Амалдардын тартиби</a:t>
+              <a:t>Амалдардын тартиби</a:t>
             </a:r>
           </a:p>
           <a:p>
@@ -50062,7 +50062,7 @@
                 </a:solidFill>
                 <a:latin typeface="PT Sans"/>
               </a:rPr>
-              <a:t>5-класс › Амалдардын тартиби</a:t>
+              <a:t>Амалдардын тартиби</a:t>
             </a:r>
           </a:p>
           <a:p>
@@ -51475,7 +51475,7 @@
                 </a:solidFill>
                 <a:latin typeface="PT Sans"/>
               </a:rPr>
-              <a:t>5-класс › Амалдардын тартиби</a:t>
+              <a:t>Амалдардын тартиби</a:t>
             </a:r>
           </a:p>
           <a:p>
@@ -52998,7 +52998,7 @@
                 </a:solidFill>
                 <a:latin typeface="PT Sans"/>
               </a:rPr>
-              <a:t>5-класс › Амалдардын тартиби</a:t>
+              <a:t>Амалдардын тартиби</a:t>
             </a:r>
           </a:p>
           <a:p>
@@ -54094,7 +54094,7 @@
                 </a:solidFill>
                 <a:latin typeface="PT Sans"/>
               </a:rPr>
-              <a:t>5-класс › Амалдардын тартиби</a:t>
+              <a:t>Амалдардын тартиби</a:t>
             </a:r>
           </a:p>
           <a:p>
@@ -55249,7 +55249,7 @@
                 </a:solidFill>
                 <a:latin typeface="PT Sans"/>
               </a:rPr>
-              <a:t>5-класс › Амалдардын тартиби</a:t>
+              <a:t>Амалдардын тартиби</a:t>
             </a:r>
           </a:p>
           <a:p>
@@ -56257,7 +56257,7 @@
                 </a:solidFill>
                 <a:latin typeface="PT Sans"/>
               </a:rPr>
-              <a:t>5-класс › Амалдардын тартиби</a:t>
+              <a:t>Амалдардын тартиби</a:t>
             </a:r>
           </a:p>
           <a:p>
@@ -57711,7 +57711,7 @@
                 </a:solidFill>
                 <a:latin typeface="PT Sans"/>
               </a:rPr>
-              <a:t>5-класс › Амалдардын тартиби</a:t>
+              <a:t>Амалдардын тартиби</a:t>
             </a:r>
           </a:p>
           <a:p>
@@ -57892,7 +57892,7 @@
                 </a:solidFill>
                 <a:latin typeface="PT Sans"/>
               </a:rPr>
-              <a:t>3-класс</a:t>
+              <a:t/>
             </a:r>
           </a:p>
         </p:txBody>
@@ -58072,7 +58072,7 @@
                 </a:solidFill>
                 <a:latin typeface="PT Sans"/>
               </a:rPr>
-              <a:t>4-класс</a:t>
+              <a:t/>
             </a:r>
           </a:p>
         </p:txBody>
@@ -58271,7 +58271,7 @@
                 </a:solidFill>
                 <a:latin typeface="PT Sans"/>
               </a:rPr>
-              <a:t>5-класс</a:t>
+              <a:t/>
             </a:r>
           </a:p>
         </p:txBody>
@@ -58526,7 +58526,7 @@
                 </a:solidFill>
                 <a:latin typeface="PT Sans"/>
               </a:rPr>
-              <a:t>6-класс</a:t>
+              <a:t/>
             </a:r>
           </a:p>
         </p:txBody>
@@ -58946,7 +58946,7 @@
                 </a:solidFill>
                 <a:latin typeface="PT Sans"/>
               </a:rPr>
-              <a:t>5-класс › Амалдардын тартиби</a:t>
+              <a:t>Амалдардын тартиби</a:t>
             </a:r>
           </a:p>
           <a:p>
@@ -61495,7 +61495,7 @@
                 </a:solidFill>
                 <a:latin typeface="PT Sans"/>
               </a:rPr>
-              <a:t>5-класс › Амалдардын тартиби</a:t>
+              <a:t>Амалдардын тартиби</a:t>
             </a:r>
           </a:p>
           <a:p>
@@ -62690,7 +62690,7 @@
                 </a:solidFill>
                 <a:latin typeface="PT Sans"/>
               </a:rPr>
-              <a:t>5-класс › Амалдардын тартиби</a:t>
+              <a:t>Амалдардын тартиби</a:t>
             </a:r>
           </a:p>
           <a:p>
@@ -63498,7 +63498,7 @@
                 </a:solidFill>
                 <a:latin typeface="PT Sans"/>
               </a:rPr>
-              <a:t>5-класс › Амалдардын тартиби</a:t>
+              <a:t>Амалдардын тартиби</a:t>
             </a:r>
           </a:p>
           <a:p>
@@ -64646,7 +64646,7 @@
                 </a:solidFill>
                 <a:latin typeface="PT Sans"/>
               </a:rPr>
-              <a:t>5-класс › Амалдардын тартиби</a:t>
+              <a:t>Амалдардын тартиби</a:t>
             </a:r>
           </a:p>
           <a:p>
